--- a/poster/poster_fixed.pptx
+++ b/poster/poster_fixed.pptx
@@ -7480,7 +7480,7 @@
                 <a:cs typeface="IBM Plex Sans"/>
                 <a:sym typeface="IBM Plex Sans"/>
               </a:rPr>
-              <a:t>Poster Presentations in context of “TODO” Lecture </a:t>
+              <a:t>Poster Presentations in context of ADRL Lecture </a:t>
             </a:r>
             <a:endParaRPr b="1" sz="4100">
               <a:solidFill>

--- a/poster/poster_fixed.pptx
+++ b/poster/poster_fixed.pptx
@@ -6606,7 +6606,7 @@
                 <a:cs typeface="IBM Plex Sans"/>
                 <a:sym typeface="IBM Plex Sans"/>
               </a:rPr>
-              <a:t>Motivation: Sparse, binary rewards are the most natural way to specify a robotic task — but they give the agent no signal on how to improve (Andrychowicz et al., 2017)</a:t>
+              <a:t>Sparse, binary rewards are the most natural way to specify a robotic task — but they give the agent no signal on how to improve (Andrychowicz et al., 2017)</a:t>
             </a:r>
             <a:endParaRPr sz="4300">
               <a:solidFill>
@@ -6646,7 +6646,7 @@
                 <a:cs typeface="IBM Plex Sans"/>
                 <a:sym typeface="IBM Plex Sans"/>
               </a:rPr>
-              <a:t>Motivation: HER is known to help under sparse rewards — but when it matters most and why it works is unclear</a:t>
+              <a:t>HER is known to help under sparse rewards — but when it matters most and why it works is unclear</a:t>
             </a:r>
             <a:endParaRPr sz="4300">
               <a:solidFill>
@@ -7315,7 +7315,7 @@
                 <a:cs typeface="IBM Plex Sans"/>
                 <a:sym typeface="IBM Plex Sans"/>
               </a:rPr>
-              <a:t>Problem Setting: Does HER's benefit scale with task difficulty, and what training-dynamics mechanism drives it?</a:t>
+              <a:t>Does HER's benefit scale with task difficulty, and what training-dynamics mechanism drives it?</a:t>
             </a:r>
             <a:endParaRPr sz="4300">
               <a:latin typeface="IBM Plex Sans"/>
@@ -7542,6 +7542,73 @@
           </a:prstGeom>
         </p:spPr>
       </p:pic>
+      <p:pic>
+        <p:nvPicPr>
+          <p:cNvPr id="86" name="Picture 85" descr="qr_repo.png"/>
+          <p:cNvPicPr>
+            <a:picLocks noChangeAspect="1"/>
+          </p:cNvPicPr>
+          <p:nvPr/>
+        </p:nvPicPr>
+        <p:blipFill>
+          <a:blip r:embed="rId8"/>
+          <a:stretch>
+            <a:fillRect/>
+          </a:stretch>
+        </p:blipFill>
+        <p:spPr>
+          <a:xfrm>
+            <a:off x="540000" y="36345172"/>
+            <a:ext cx="2011680" cy="2011680"/>
+          </a:xfrm>
+          <a:prstGeom prst="rect">
+            <a:avLst/>
+          </a:prstGeom>
+        </p:spPr>
+      </p:pic>
+      <p:sp>
+        <p:nvSpPr>
+          <p:cNvPr id="87" name="TextBox 86"/>
+          <p:cNvSpPr txBox="1"/>
+          <p:nvPr/>
+        </p:nvSpPr>
+        <p:spPr>
+          <a:xfrm>
+            <a:off x="2751680" y="36345172"/>
+            <a:ext cx="8566720" cy="2011680"/>
+          </a:xfrm>
+          <a:prstGeom prst="rect">
+            <a:avLst/>
+          </a:prstGeom>
+          <a:noFill/>
+        </p:spPr>
+        <p:txBody>
+          <a:bodyPr wrap="square">
+            <a:spAutoFit/>
+          </a:bodyPr>
+          <a:lstStyle/>
+          <a:p>
+            <a:r>
+              <a:rPr sz="1400" b="1">
+                <a:solidFill>
+                  <a:srgbClr val="0B5394"/>
+                </a:solidFill>
+              </a:rPr>
+              <a:t>Code, data &amp; full report</a:t>
+            </a:r>
+          </a:p>
+          <a:p>
+            <a:r>
+              <a:rPr sz="1100">
+                <a:solidFill>
+                  <a:srgbClr val="404040"/>
+                </a:solidFill>
+              </a:rPr>
+              <a:t>github.com/mustafa99705/-adrl-sac-her-fetchreach</a:t>
+            </a:r>
+          </a:p>
+        </p:txBody>
+      </p:sp>
     </p:spTree>
   </p:cSld>
   <p:clrMapOvr>

--- a/poster/poster_fixed.pptx
+++ b/poster/poster_fixed.pptx
@@ -7609,6 +7609,30 @@
           </a:p>
         </p:txBody>
       </p:sp>
+      <p:pic>
+        <p:nvPicPr>
+          <p:cNvPr id="88" name="Picture 87" descr="sim_combined.png"/>
+          <p:cNvPicPr>
+            <a:picLocks noChangeAspect="1"/>
+          </p:cNvPicPr>
+          <p:nvPr/>
+        </p:nvPicPr>
+        <p:blipFill>
+          <a:blip r:embed="rId9"/>
+          <a:stretch>
+            <a:fillRect/>
+          </a:stretch>
+        </p:blipFill>
+        <p:spPr>
+          <a:xfrm>
+            <a:off x="540000" y="26123300"/>
+            <a:ext cx="9636400" cy="5300000"/>
+          </a:xfrm>
+          <a:prstGeom prst="rect">
+            <a:avLst/>
+          </a:prstGeom>
+        </p:spPr>
+      </p:pic>
     </p:spTree>
   </p:cSld>
   <p:clrMapOvr>

--- a/poster/poster_fixed.pptx
+++ b/poster/poster_fixed.pptx
@@ -7633,6 +7633,30 @@
           </a:prstGeom>
         </p:spPr>
       </p:pic>
+      <p:pic>
+        <p:nvPicPr>
+          <p:cNvPr id="89" name="Picture 88" descr="fig6_push_ablation-1.png"/>
+          <p:cNvPicPr>
+            <a:picLocks noChangeAspect="1"/>
+          </p:cNvPicPr>
+          <p:nvPr/>
+        </p:nvPicPr>
+        <p:blipFill>
+          <a:blip r:embed="rId10"/>
+          <a:stretch>
+            <a:fillRect/>
+          </a:stretch>
+        </p:blipFill>
+        <p:spPr>
+          <a:xfrm>
+            <a:off x="12151200" y="32071573"/>
+            <a:ext cx="14000000" cy="9000000"/>
+          </a:xfrm>
+          <a:prstGeom prst="rect">
+            <a:avLst/>
+          </a:prstGeom>
+        </p:spPr>
+      </p:pic>
     </p:spTree>
   </p:cSld>
   <p:clrMapOvr>

--- a/poster/poster_fixed.pptx
+++ b/poster/poster_fixed.pptx
@@ -7611,30 +7611,6 @@
       </p:sp>
       <p:pic>
         <p:nvPicPr>
-          <p:cNvPr id="88" name="Picture 87" descr="sim_combined.png"/>
-          <p:cNvPicPr>
-            <a:picLocks noChangeAspect="1"/>
-          </p:cNvPicPr>
-          <p:nvPr/>
-        </p:nvPicPr>
-        <p:blipFill>
-          <a:blip r:embed="rId9"/>
-          <a:stretch>
-            <a:fillRect/>
-          </a:stretch>
-        </p:blipFill>
-        <p:spPr>
-          <a:xfrm>
-            <a:off x="540000" y="26123300"/>
-            <a:ext cx="9636400" cy="5300000"/>
-          </a:xfrm>
-          <a:prstGeom prst="rect">
-            <a:avLst/>
-          </a:prstGeom>
-        </p:spPr>
-      </p:pic>
-      <p:pic>
-        <p:nvPicPr>
           <p:cNvPr id="89" name="Picture 88" descr="fig6_push_ablation-1.png"/>
           <p:cNvPicPr>
             <a:picLocks noChangeAspect="1"/>
@@ -7651,6 +7627,30 @@
           <a:xfrm>
             <a:off x="12151200" y="32071573"/>
             <a:ext cx="14000000" cy="9000000"/>
+          </a:xfrm>
+          <a:prstGeom prst="rect">
+            <a:avLst/>
+          </a:prstGeom>
+        </p:spPr>
+      </p:pic>
+      <p:pic>
+        <p:nvPicPr>
+          <p:cNvPr id="90" name="Picture 89" descr="sim_combined.png"/>
+          <p:cNvPicPr>
+            <a:picLocks noChangeAspect="1"/>
+          </p:cNvPicPr>
+          <p:nvPr/>
+        </p:nvPicPr>
+        <p:blipFill>
+          <a:blip r:embed="rId11"/>
+          <a:stretch>
+            <a:fillRect/>
+          </a:stretch>
+        </p:blipFill>
+        <p:spPr>
+          <a:xfrm>
+            <a:off x="540000" y="26123300"/>
+            <a:ext cx="9967710" cy="5300000"/>
           </a:xfrm>
           <a:prstGeom prst="rect">
             <a:avLst/>

--- a/poster/poster_fixed.pptx
+++ b/poster/poster_fixed.pptx
@@ -7657,6 +7657,59 @@
           </a:prstGeom>
         </p:spPr>
       </p:pic>
+      <p:sp>
+        <p:nvSpPr>
+          <p:cNvPr id="91" name="TextBox 90"/>
+          <p:cNvSpPr txBox="1"/>
+          <p:nvPr/>
+        </p:nvSpPr>
+        <p:spPr>
+          <a:xfrm>
+            <a:off x="540000" y="38556852"/>
+            <a:ext cx="10984200" cy="1400000"/>
+          </a:xfrm>
+          <a:prstGeom prst="rect">
+            <a:avLst/>
+          </a:prstGeom>
+          <a:noFill/>
+        </p:spPr>
+        <p:txBody>
+          <a:bodyPr wrap="square">
+            <a:spAutoFit/>
+          </a:bodyPr>
+          <a:lstStyle/>
+          <a:p>
+            <a:r>
+              <a:rPr sz="1300" b="1">
+                <a:solidFill>
+                  <a:srgbClr val="0B5394"/>
+                </a:solidFill>
+              </a:rPr>
+              <a:t>References</a:t>
+            </a:r>
+          </a:p>
+          <a:p>
+            <a:r>
+              <a:rPr sz="1100">
+                <a:solidFill>
+                  <a:srgbClr val="404040"/>
+                </a:solidFill>
+              </a:rPr>
+              <a:t>Andrychowicz et al., Hindsight Experience Replay, NeurIPS 2017</a:t>
+            </a:r>
+          </a:p>
+          <a:p>
+            <a:r>
+              <a:rPr sz="1100">
+                <a:solidFill>
+                  <a:srgbClr val="404040"/>
+                </a:solidFill>
+              </a:rPr>
+              <a:t>Haarnoja et al., Soft Actor-Critic, ICML 2018</a:t>
+            </a:r>
+          </a:p>
+        </p:txBody>
+      </p:sp>
     </p:spTree>
   </p:cSld>
   <p:clrMapOvr>

--- a/poster/poster_fixed.pptx
+++ b/poster/poster_fixed.pptx
@@ -7710,6 +7710,30 @@
           </a:p>
         </p:txBody>
       </p:sp>
+      <p:pic>
+        <p:nvPicPr>
+          <p:cNvPr id="92" name="Picture 91" descr="design_grid.png"/>
+          <p:cNvPicPr>
+            <a:picLocks noChangeAspect="1"/>
+          </p:cNvPicPr>
+          <p:nvPr/>
+        </p:nvPicPr>
+        <p:blipFill>
+          <a:blip r:embed="rId12"/>
+          <a:stretch>
+            <a:fillRect/>
+          </a:stretch>
+        </p:blipFill>
+        <p:spPr>
+          <a:xfrm>
+            <a:off x="21920100" y="13027800"/>
+            <a:ext cx="7414600" cy="5566577"/>
+          </a:xfrm>
+          <a:prstGeom prst="rect">
+            <a:avLst/>
+          </a:prstGeom>
+        </p:spPr>
+      </p:pic>
     </p:spTree>
   </p:cSld>
   <p:clrMapOvr>
